--- a/Topic_D/Exam_Practice/TD-L08_Writing_Workshop_Personal_Qualities_and_Professional_Skills.pptx
+++ b/Topic_D/Exam_Practice/TD-L08_Writing_Workshop_Personal_Qualities_and_Professional_Skills.pptx
@@ -784,7 +784,11 @@
           <a:lstStyle/>
           <a:p>
             <a:r>
-              <a:rPr lang="en-US" dirty="0"/>
+              <a:rPr lang="ar-SA" dirty="0">
+                <a:latin typeface="Amiri" pitchFamily="2" charset="-78"/>
+                <a:ea typeface="Amiri" pitchFamily="2" charset="-78"/>
+                <a:cs typeface="Amiri" pitchFamily="2" charset="-78"/>
+              </a:rPr>
               <a:t>Q3 (3 min to choose and read). Title (أ) suits Core and Develop; title (ب) suits Stretch.</a:t>
             </a:r>
             <a:endParaRPr lang="en-US" dirty="0"/>
@@ -1403,7 +1407,11 @@
           <a:lstStyle/>
           <a:p>
             <a:r>
-              <a:rPr lang="en-US" dirty="0"/>
+              <a:rPr lang="ar-SA" dirty="0">
+                <a:latin typeface="Amiri" pitchFamily="2" charset="-78"/>
+                <a:ea typeface="Amiri" pitchFamily="2" charset="-78"/>
+                <a:cs typeface="Amiri" pitchFamily="2" charset="-78"/>
+              </a:rPr>
               <a:t>WELCOME (1 min) — while students join.
 • Greet each student by name as they arrive: السَّلَامُ عَلَيْكُمْ. Take the register (Pastoral Tracker: attendance 0/1).
 • 2-MINUTE CHECK-IN (SEND training): a private chat to any student who seemed unsettled last lesson — “Are you okay today? 👍 / 👎”.
@@ -1936,7 +1944,11 @@
           <a:lstStyle/>
           <a:p>
             <a:r>
-              <a:rPr lang="en-US" dirty="0"/>
+              <a:rPr lang="ar-SA" dirty="0">
+                <a:latin typeface="Amiri" pitchFamily="2" charset="-78"/>
+                <a:ea typeface="Amiri" pitchFamily="2" charset="-78"/>
+                <a:cs typeface="Amiri" pitchFamily="2" charset="-78"/>
+              </a:rPr>
               <a:t>Question words: أَيُّ (which) · مَا صِفَاتُكِ (your qualities) · سَابِقَةٌ (previous — PAST) · مَتَى (when — FUTURE availability).</a:t>
             </a:r>
             <a:endParaRPr lang="en-US" dirty="0"/>
@@ -2508,6 +2520,7 @@
                   <a:srgbClr val="D4AF37"/>
                 </a:solidFill>
                 <a:latin typeface="Amiri" pitchFamily="2" charset="-78"/>
+                <a:ea typeface="Amiri" pitchFamily="2" charset="-78"/>
                 <a:cs typeface="Amiri" pitchFamily="2" charset="-78"/>
               </a:rPr>
               <a:t>م</a:t>
@@ -2714,6 +2727,7 @@
                   <a:srgbClr val="D4AF37"/>
                 </a:solidFill>
                 <a:latin typeface="Amiri" pitchFamily="2" charset="-78"/>
+                <a:ea typeface="Amiri" pitchFamily="2" charset="-78"/>
                 <a:cs typeface="Amiri" pitchFamily="2" charset="-78"/>
               </a:rPr>
               <a:t>وَرْشَةُ الكِتَابَةِ — الصِّفَاتُ وَالمَهَارَاتُ</a:t>
@@ -3171,6 +3185,7 @@
                   <a:srgbClr val="D4AF37"/>
                 </a:solidFill>
                 <a:latin typeface="Amiri" pitchFamily="2" charset="-78"/>
+                <a:ea typeface="Amiri" pitchFamily="2" charset="-78"/>
                 <a:cs typeface="Amiri" pitchFamily="2" charset="-78"/>
               </a:rPr>
               <a:t>م</a:t>
@@ -3491,6 +3506,7 @@
                   <a:srgbClr val="8A6D1E"/>
                 </a:solidFill>
                 <a:latin typeface="Amiri" pitchFamily="2" charset="-78"/>
+                <a:ea typeface="Amiri" pitchFamily="2" charset="-78"/>
                 <a:cs typeface="Amiri" pitchFamily="2" charset="-78"/>
               </a:rPr>
               <a:t>نَمُوذَجُ الإِجَابَةِ</a:t>
@@ -3604,6 +3620,7 @@
                   <a:srgbClr val="1F2A37"/>
                 </a:solidFill>
                 <a:latin typeface="Amiri" pitchFamily="2" charset="-78"/>
+                <a:ea typeface="Amiri" pitchFamily="2" charset="-78"/>
                 <a:cs typeface="Amiri" pitchFamily="2" charset="-78"/>
               </a:rPr>
               <a:t>إِلَى مُدِيرِ المُخَيَّمِ الصَّيْفِيِّ،</a:t>
@@ -3623,6 +3640,7 @@
                   <a:srgbClr val="1F2A37"/>
                 </a:solidFill>
                 <a:latin typeface="Amiri" pitchFamily="2" charset="-78"/>
+                <a:ea typeface="Amiri" pitchFamily="2" charset="-78"/>
                 <a:cs typeface="Amiri" pitchFamily="2" charset="-78"/>
               </a:rPr>
               <a:t>اسْمِي لَيْلَى، وَعُمْرِي سَبْعَ عَشْرَةَ سَنَةً. رَأَيْتُ إِعْلَانَكُمْ عَنْ وَظِيفَةِ مُسَاعِدَةٍ فِي المُخَيَّمِ، وَأُرِيدُ أَنْ أَتَقَدَّمَ لَهَا. أَنَا صَبُورَةٌ وَمُنَظَّمَةٌ وَاجْتِمَاعِيَّةٌ. فَمَثَلًا أُسَاعِدُ أَخِي الصَّغِيرَ فِي وَاجِبَاتِهِ كُلَّ يَوْمٍ. فِي الصَّيْفِ المَاضِي تَطَوَّعْتُ فِي نَادٍ لِلْأَطْفَالِ، وَكَانَتْ تَجْرِبَةً مُمْتِعَةً. نُقْطَةُ ضَعْفِي أَنِّي خَجُولَةٌ قَلِيلًا، لٰكِنِّي أُحَاوِلُ أَنْ أَتَحَسَّنَ. فِي رَأْيِي، هٰذِهِ الوَظِيفَةُ تُنَاسِبُنِي، لِأَنِّي أُحِبُّ الأَطْفَالَ. سَأَكُونُ مُتَاحَةً مِنْ يُولْيُو إِلَى أُغُسْطُسَ.</a:t>
@@ -3642,6 +3660,7 @@
                   <a:srgbClr val="1F2A37"/>
                 </a:solidFill>
                 <a:latin typeface="Amiri" pitchFamily="2" charset="-78"/>
+                <a:ea typeface="Amiri" pitchFamily="2" charset="-78"/>
                 <a:cs typeface="Amiri" pitchFamily="2" charset="-78"/>
               </a:rPr>
               <a:t>مَعَ الشُّكْرِ،</a:t>
@@ -3661,6 +3680,7 @@
                   <a:srgbClr val="1F2A37"/>
                 </a:solidFill>
                 <a:latin typeface="Amiri" pitchFamily="2" charset="-78"/>
+                <a:ea typeface="Amiri" pitchFamily="2" charset="-78"/>
                 <a:cs typeface="Amiri" pitchFamily="2" charset="-78"/>
               </a:rPr>
               <a:t>لَيْلَى</a:t>
@@ -3824,11 +3844,12 @@
               <a:buNone/>
             </a:pPr>
             <a:r>
-              <a:rPr lang="en-US" sz="950" b="1" dirty="0">
+              <a:rPr lang="ar-SA" sz="950" b="1" dirty="0">
                 <a:solidFill>
                   <a:srgbClr val="FFFFFF"/>
                 </a:solidFill>
                 <a:latin typeface="Calibri" pitchFamily="34" charset="0"/>
+                <a:ea typeface="Amiri" pitchFamily="2" charset="-78"/>
                 <a:cs typeface="Amiri" pitchFamily="2" charset="-78"/>
               </a:rPr>
               <a:t>صَبُورَةٌ وَمُنَظَّمَةٌ</a:t>
@@ -3889,11 +3910,12 @@
               <a:buNone/>
             </a:pPr>
             <a:r>
-              <a:rPr lang="en-US" sz="950" b="1" dirty="0">
+              <a:rPr lang="ar-SA" sz="950" b="1" dirty="0">
                 <a:solidFill>
                   <a:srgbClr val="FFFFFF"/>
                 </a:solidFill>
                 <a:latin typeface="Calibri" pitchFamily="34" charset="0"/>
+                <a:ea typeface="Amiri" pitchFamily="2" charset="-78"/>
                 <a:cs typeface="Amiri" pitchFamily="2" charset="-78"/>
               </a:rPr>
               <a:t>فَمَثَلًا</a:t>
@@ -3954,11 +3976,12 @@
               <a:buNone/>
             </a:pPr>
             <a:r>
-              <a:rPr lang="en-US" sz="950" b="1" dirty="0">
+              <a:rPr lang="ar-SA" sz="950" b="1" dirty="0">
                 <a:solidFill>
                   <a:srgbClr val="FFFFFF"/>
                 </a:solidFill>
                 <a:latin typeface="Calibri" pitchFamily="34" charset="0"/>
+                <a:ea typeface="Amiri" pitchFamily="2" charset="-78"/>
                 <a:cs typeface="Amiri" pitchFamily="2" charset="-78"/>
               </a:rPr>
               <a:t>تَطَوَّعْتُ</a:t>
@@ -4019,11 +4042,12 @@
               <a:buNone/>
             </a:pPr>
             <a:r>
-              <a:rPr lang="en-US" sz="950" b="1" dirty="0">
+              <a:rPr lang="ar-SA" sz="950" b="1" dirty="0">
                 <a:solidFill>
                   <a:srgbClr val="FFFFFF"/>
                 </a:solidFill>
                 <a:latin typeface="Calibri" pitchFamily="34" charset="0"/>
+                <a:ea typeface="Amiri" pitchFamily="2" charset="-78"/>
                 <a:cs typeface="Amiri" pitchFamily="2" charset="-78"/>
               </a:rPr>
               <a:t>سَأَكُونُ مُتَاحَةً</a:t>
@@ -4157,6 +4181,7 @@
                   <a:srgbClr val="D4AF37"/>
                 </a:solidFill>
                 <a:latin typeface="Amiri" pitchFamily="2" charset="-78"/>
+                <a:ea typeface="Amiri" pitchFamily="2" charset="-78"/>
                 <a:cs typeface="Amiri" pitchFamily="2" charset="-78"/>
               </a:rPr>
               <a:t>م</a:t>
@@ -4477,6 +4502,7 @@
                   <a:srgbClr val="8A6D1E"/>
                 </a:solidFill>
                 <a:latin typeface="Amiri" pitchFamily="2" charset="-78"/>
+                <a:ea typeface="Amiri" pitchFamily="2" charset="-78"/>
                 <a:cs typeface="Amiri" pitchFamily="2" charset="-78"/>
               </a:rPr>
               <a:t>نَمُوذَجُ الإِجَابَةِ</a:t>
@@ -4590,6 +4616,7 @@
                   <a:srgbClr val="1F2A37"/>
                 </a:solidFill>
                 <a:latin typeface="Amiri" pitchFamily="2" charset="-78"/>
+                <a:ea typeface="Amiri" pitchFamily="2" charset="-78"/>
                 <a:cs typeface="Amiri" pitchFamily="2" charset="-78"/>
               </a:rPr>
               <a:t>حَضْرَةَ مُدِيرِ المُخَيَّمِ الصَّيْفِيِّ المُحْتَرَمِ،</a:t>
@@ -4609,6 +4636,7 @@
                   <a:srgbClr val="1F2A37"/>
                 </a:solidFill>
                 <a:latin typeface="Amiri" pitchFamily="2" charset="-78"/>
+                <a:ea typeface="Amiri" pitchFamily="2" charset="-78"/>
                 <a:cs typeface="Amiri" pitchFamily="2" charset="-78"/>
               </a:rPr>
               <a:t>أَتَقَدَّمُ بِطَلَبِ وَظِيفَةِ المُسَاعِدَةِ الَّتِي أَعْلَنْتُمْ عَنْهَا، لِأَنَّنِي أُؤْمِنُ بِأَنَّ صِفَاتِي تُنَاسِبُ العَمَلَ مَعَ الأَطْفَالِ. فَأَنَا صَبُورَةٌ وَمُنَظَّمَةٌ، وَأَعْرِفُ كَيْفَ أُحَوِّلُ النَّشَاطَ البَسِيطَ إِلَى لُعْبَةٍ مُمْتِعَةٍ. وَقَدْ تَطَوَّعْتُ الصَّيْفَ المَاضِي فِي نَادٍ لِلْأَطْفَالِ، حَيْثُ كُنْتُ مَسْؤُولَةً عَنْ مَجْمُوعَةٍ مِنْ عَشَرَةِ أَطْفَالٍ، فَتَعَلَّمْتُ أَنْ أَحُلَّ الخِلَافَاتِ بِهُدُوءٍ. صَحِيحٌ أَنَّنِي كُنْتُ خَجُولَةً فِي البِدَايَةِ، غَيْرَ أَنَّ هٰذِهِ التَّجْرِبَةَ زَادَتْ ثِقَتِي بِنَفْسِي كَثِيرًا. وَسَأَكُونُ مُتَاحَةً طُوالَ يُولْيُو وَأُغُسْطُسَ، وَيُسْعِدُنِي أَنْ أُرْسِلَ لَكُمْ رِسَالَةَ تَوْصِيَةٍ مِنْ مُدِيرَةِ النَّادِي.</a:t>
@@ -4628,6 +4656,7 @@
                   <a:srgbClr val="1F2A37"/>
                 </a:solidFill>
                 <a:latin typeface="Amiri" pitchFamily="2" charset="-78"/>
+                <a:ea typeface="Amiri" pitchFamily="2" charset="-78"/>
                 <a:cs typeface="Amiri" pitchFamily="2" charset="-78"/>
               </a:rPr>
               <a:t>وَتَفَضَّلُوا بِقَبُولِ فَائِقِ الاحْتِرَامِ،</a:t>
@@ -4647,6 +4676,7 @@
                   <a:srgbClr val="1F2A37"/>
                 </a:solidFill>
                 <a:latin typeface="Amiri" pitchFamily="2" charset="-78"/>
+                <a:ea typeface="Amiri" pitchFamily="2" charset="-78"/>
                 <a:cs typeface="Amiri" pitchFamily="2" charset="-78"/>
               </a:rPr>
               <a:t>لَيْلَى</a:t>
@@ -4810,11 +4840,12 @@
               <a:buNone/>
             </a:pPr>
             <a:r>
-              <a:rPr lang="en-US" sz="950" b="1" dirty="0">
+              <a:rPr lang="ar-SA" sz="950" b="1" dirty="0">
                 <a:solidFill>
                   <a:srgbClr val="FFFFFF"/>
                 </a:solidFill>
                 <a:latin typeface="Calibri" pitchFamily="34" charset="0"/>
+                <a:ea typeface="Amiri" pitchFamily="2" charset="-78"/>
                 <a:cs typeface="Amiri" pitchFamily="2" charset="-78"/>
               </a:rPr>
               <a:t>الَّتِي أَعْلَنْتُمْ عَنْهَا</a:t>
@@ -4875,11 +4906,12 @@
               <a:buNone/>
             </a:pPr>
             <a:r>
-              <a:rPr lang="en-US" sz="950" b="1" dirty="0">
+              <a:rPr lang="ar-SA" sz="950" b="1" dirty="0">
                 <a:solidFill>
                   <a:srgbClr val="FFFFFF"/>
                 </a:solidFill>
                 <a:latin typeface="Calibri" pitchFamily="34" charset="0"/>
+                <a:ea typeface="Amiri" pitchFamily="2" charset="-78"/>
                 <a:cs typeface="Amiri" pitchFamily="2" charset="-78"/>
               </a:rPr>
               <a:t>أُؤْمِنُ بِأَنَّ</a:t>
@@ -4940,11 +4972,12 @@
               <a:buNone/>
             </a:pPr>
             <a:r>
-              <a:rPr lang="en-US" sz="950" b="1" dirty="0">
+              <a:rPr lang="ar-SA" sz="950" b="1" dirty="0">
                 <a:solidFill>
                   <a:srgbClr val="FFFFFF"/>
                 </a:solidFill>
                 <a:latin typeface="Calibri" pitchFamily="34" charset="0"/>
+                <a:ea typeface="Amiri" pitchFamily="2" charset="-78"/>
                 <a:cs typeface="Amiri" pitchFamily="2" charset="-78"/>
               </a:rPr>
               <a:t>كُنْتُ مَسْؤُولَةً عَنْ</a:t>
@@ -5005,11 +5038,12 @@
               <a:buNone/>
             </a:pPr>
             <a:r>
-              <a:rPr lang="en-US" sz="950" b="1" dirty="0">
+              <a:rPr lang="ar-SA" sz="950" b="1" dirty="0">
                 <a:solidFill>
                   <a:srgbClr val="FFFFFF"/>
                 </a:solidFill>
                 <a:latin typeface="Calibri" pitchFamily="34" charset="0"/>
+                <a:ea typeface="Amiri" pitchFamily="2" charset="-78"/>
                 <a:cs typeface="Amiri" pitchFamily="2" charset="-78"/>
               </a:rPr>
               <a:t>صَحِيحٌ أَنَّ … غَيْرَ أَنَّ</a:t>
@@ -5143,6 +5177,7 @@
                   <a:srgbClr val="D4AF37"/>
                 </a:solidFill>
                 <a:latin typeface="Amiri" pitchFamily="2" charset="-78"/>
+                <a:ea typeface="Amiri" pitchFamily="2" charset="-78"/>
                 <a:cs typeface="Amiri" pitchFamily="2" charset="-78"/>
               </a:rPr>
               <a:t>م</a:t>
@@ -5463,6 +5498,7 @@
                   <a:srgbClr val="8A6D1E"/>
                 </a:solidFill>
                 <a:latin typeface="Amiri" pitchFamily="2" charset="-78"/>
+                <a:ea typeface="Amiri" pitchFamily="2" charset="-78"/>
                 <a:cs typeface="Amiri" pitchFamily="2" charset="-78"/>
               </a:rPr>
               <a:t>اخْتَرْ عُنْوَانًا وَاحِدًا</a:t>
@@ -5743,6 +5779,7 @@
                   <a:srgbClr val="1B3B6F"/>
                 </a:solidFill>
                 <a:latin typeface="Amiri" pitchFamily="2" charset="-78"/>
+                <a:ea typeface="Amiri" pitchFamily="2" charset="-78"/>
                 <a:cs typeface="Amiri" pitchFamily="2" charset="-78"/>
               </a:rPr>
               <a:t>نِقَاطُ قُوَّتِي وَضَعْفِي</a:t>
@@ -5781,6 +5818,7 @@
                   <a:srgbClr val="1B3B6F"/>
                 </a:solidFill>
                 <a:latin typeface="Amiri" pitchFamily="2" charset="-78"/>
+                <a:ea typeface="Amiri" pitchFamily="2" charset="-78"/>
                 <a:cs typeface="Amiri" pitchFamily="2" charset="-78"/>
               </a:rPr>
               <a:t>(أ)</a:t>
@@ -5887,6 +5925,7 @@
                   <a:srgbClr val="1B3B6F"/>
                 </a:solidFill>
                 <a:latin typeface="Amiri" pitchFamily="2" charset="-78"/>
+                <a:ea typeface="Amiri" pitchFamily="2" charset="-78"/>
                 <a:cs typeface="Amiri" pitchFamily="2" charset="-78"/>
               </a:rPr>
               <a:t>صِفَاتُكَ الإِيجَابِيَّةُ مَعَ أَمْثِلَةٍ · نُقْطَةُ ضَعْفٍ وَكَيْفَ تُعَالِجُهَا · تَجْرِبَةٌ أَظْهَرَتْ صِفَاتِكَ · الوَظِيفَةُ الَّتِي تُنَاسِبُكَ</a:t>
@@ -6018,6 +6057,7 @@
                   <a:srgbClr val="1B3B6F"/>
                 </a:solidFill>
                 <a:latin typeface="Amiri" pitchFamily="2" charset="-78"/>
+                <a:ea typeface="Amiri" pitchFamily="2" charset="-78"/>
                 <a:cs typeface="Amiri" pitchFamily="2" charset="-78"/>
               </a:rPr>
               <a:t>الصِّفَاتُ الشَّخْصِيَّةُ أَمِ الشَّهَادَاتُ؟</a:t>
@@ -6056,6 +6096,7 @@
                   <a:srgbClr val="1B3B6F"/>
                 </a:solidFill>
                 <a:latin typeface="Amiri" pitchFamily="2" charset="-78"/>
+                <a:ea typeface="Amiri" pitchFamily="2" charset="-78"/>
                 <a:cs typeface="Amiri" pitchFamily="2" charset="-78"/>
               </a:rPr>
               <a:t>(ب)</a:t>
@@ -6162,6 +6203,7 @@
                   <a:srgbClr val="1B3B6F"/>
                 </a:solidFill>
                 <a:latin typeface="Amiri" pitchFamily="2" charset="-78"/>
+                <a:ea typeface="Amiri" pitchFamily="2" charset="-78"/>
                 <a:cs typeface="Amiri" pitchFamily="2" charset="-78"/>
               </a:rPr>
               <a:t>مَا يَبْحَثُ عَنْهُ أَصْحَابُ العَمَلِ · أَهَمِّيَّةُ الشَّهَادَاتِ وَالصِّفَاتِ · مِثَالٌ مِنَ الوَاقِعِ · رَأْيُكَ</a:t>
@@ -6361,6 +6403,7 @@
                   <a:srgbClr val="D4AF37"/>
                 </a:solidFill>
                 <a:latin typeface="Amiri" pitchFamily="2" charset="-78"/>
+                <a:ea typeface="Amiri" pitchFamily="2" charset="-78"/>
                 <a:cs typeface="Amiri" pitchFamily="2" charset="-78"/>
               </a:rPr>
               <a:t>م</a:t>
@@ -6681,6 +6724,7 @@
                   <a:srgbClr val="8A6D1E"/>
                 </a:solidFill>
                 <a:latin typeface="Amiri" pitchFamily="2" charset="-78"/>
+                <a:ea typeface="Amiri" pitchFamily="2" charset="-78"/>
                 <a:cs typeface="Amiri" pitchFamily="2" charset="-78"/>
               </a:rPr>
               <a:t>خُطَّةُ الكِتَابَةِ</a:t>
@@ -7305,6 +7349,7 @@
                   <a:srgbClr val="1B3B6F"/>
                 </a:solidFill>
                 <a:latin typeface="Amiri" pitchFamily="2" charset="-78"/>
+                <a:ea typeface="Amiri" pitchFamily="2" charset="-78"/>
                 <a:cs typeface="Amiri" pitchFamily="2" charset="-78"/>
               </a:rPr>
               <a:t>أَنَا مُنَظَّمٌ؛ فَمَثَلًا أَكْتُبُ جَدْوَلًا لِوَاجِبَاتِي.</a:t>
@@ -7404,6 +7449,7 @@
                   <a:srgbClr val="1B3B6F"/>
                 </a:solidFill>
                 <a:latin typeface="Amiri" pitchFamily="2" charset="-78"/>
+                <a:ea typeface="Amiri" pitchFamily="2" charset="-78"/>
                 <a:cs typeface="Amiri" pitchFamily="2" charset="-78"/>
               </a:rPr>
               <a:t>اخْتَرْتُ سَارَةَ لِأَنَّهَا مُبْدِعَةٌ، وَيُوسُفَ لِأَنَّهُ دَقِيقٌ.</a:t>
@@ -7503,6 +7549,7 @@
                   <a:srgbClr val="1B3B6F"/>
                 </a:solidFill>
                 <a:latin typeface="Amiri" pitchFamily="2" charset="-78"/>
+                <a:ea typeface="Amiri" pitchFamily="2" charset="-78"/>
                 <a:cs typeface="Amiri" pitchFamily="2" charset="-78"/>
               </a:rPr>
               <a:t>أُرِيدُ أَنْ أَكُونَ مُدِيرَ مَشَارِيعَ.</a:t>
@@ -7664,6 +7711,7 @@
                   <a:srgbClr val="1F2A37"/>
                 </a:solidFill>
                 <a:latin typeface="Amiri" pitchFamily="2" charset="-78"/>
+                <a:ea typeface="Amiri" pitchFamily="2" charset="-78"/>
                 <a:cs typeface="Amiri" pitchFamily="2" charset="-78"/>
               </a:rPr>
               <a:t>أ</a:t>
@@ -7690,6 +7738,7 @@
                   <a:srgbClr val="1F2A37"/>
                 </a:solidFill>
                 <a:latin typeface="Amiri" pitchFamily="2" charset="-78"/>
+                <a:ea typeface="Amiri" pitchFamily="2" charset="-78"/>
                 <a:cs typeface="Amiri" pitchFamily="2" charset="-78"/>
               </a:rPr>
               <a:t>ب</a:t>
@@ -7836,6 +7885,7 @@
                   <a:srgbClr val="D4AF37"/>
                 </a:solidFill>
                 <a:latin typeface="Amiri" pitchFamily="2" charset="-78"/>
+                <a:ea typeface="Amiri" pitchFamily="2" charset="-78"/>
                 <a:cs typeface="Amiri" pitchFamily="2" charset="-78"/>
               </a:rPr>
               <a:t>م</a:t>
@@ -8093,6 +8143,7 @@
                   <a:srgbClr val="8A6D1E"/>
                 </a:solidFill>
                 <a:latin typeface="Amiri" pitchFamily="2" charset="-78"/>
+                <a:ea typeface="Amiri" pitchFamily="2" charset="-78"/>
                 <a:cs typeface="Amiri" pitchFamily="2" charset="-78"/>
               </a:rPr>
               <a:t>أ</a:t>
@@ -8157,6 +8208,7 @@
                   <a:srgbClr val="1B3B6F"/>
                 </a:solidFill>
                 <a:latin typeface="Amiri" pitchFamily="2" charset="-78"/>
+                <a:ea typeface="Amiri" pitchFamily="2" charset="-78"/>
                 <a:cs typeface="Amiri" pitchFamily="2" charset="-78"/>
               </a:rPr>
               <a:t>أ</a:t>
@@ -8208,6 +8260,7 @@
                   <a:srgbClr val="8A6D1E"/>
                 </a:solidFill>
                 <a:latin typeface="Amiri" pitchFamily="2" charset="-78"/>
+                <a:ea typeface="Amiri" pitchFamily="2" charset="-78"/>
                 <a:cs typeface="Amiri" pitchFamily="2" charset="-78"/>
               </a:rPr>
               <a:t>نَمُوذَجُ الإِجَابَةِ</a:t>
@@ -8321,6 +8374,7 @@
                   <a:srgbClr val="1F2A37"/>
                 </a:solidFill>
                 <a:latin typeface="Amiri" pitchFamily="2" charset="-78"/>
+                <a:ea typeface="Amiri" pitchFamily="2" charset="-78"/>
                 <a:cs typeface="Amiri" pitchFamily="2" charset="-78"/>
               </a:rPr>
               <a:t>أَنَا شَخْصٌ اجْتِمَاعِيٌّ وَمُتَعَاوِنٌ. أُحِبُّ العَمَلَ فِي فَرِيقٍ، وَأُحِبُّ مُسَاعَدَةَ الآخَرِينَ. أَنَا أَيْضًا مُنَظَّمٌ؛ فَمَثَلًا أَكْتُبُ جَدْوَلًا لِوَاجِبَاتِي كُلَّ أُسْبُوعٍ، وَلَا أَتَأَخَّرُ أَبَدًا عَنِ المَوَاعِيدِ.</a:t>
@@ -8340,6 +8394,7 @@
                   <a:srgbClr val="1F2A37"/>
                 </a:solidFill>
                 <a:latin typeface="Amiri" pitchFamily="2" charset="-78"/>
+                <a:ea typeface="Amiri" pitchFamily="2" charset="-78"/>
                 <a:cs typeface="Amiri" pitchFamily="2" charset="-78"/>
               </a:rPr>
               <a:t>لٰكِنْ عِنْدِي نُقْطَةُ ضَعْفٍ: أَنَا عَصَبِيٌّ أَحْيَانًا، خُصُوصًا عِنْدَمَا أَكُونُ تَعْبَانَ. أُحَاوِلُ أَنْ أَكُونَ أَهْدَأَ، وَأَلْعَبُ الرِّيَاضَةَ لِكَيْ أَتَحَكَّمَ فِي أَعْصَابِي.</a:t>
@@ -8359,6 +8414,7 @@
                   <a:srgbClr val="1F2A37"/>
                 </a:solidFill>
                 <a:latin typeface="Amiri" pitchFamily="2" charset="-78"/>
+                <a:ea typeface="Amiri" pitchFamily="2" charset="-78"/>
                 <a:cs typeface="Amiri" pitchFamily="2" charset="-78"/>
               </a:rPr>
               <a:t>فِي السَّنَةِ المَاضِيَةِ كُنْتُ قَائِدَ فَرِيقٍ فِي مَشْرُوعِ العُلُومِ. كَانَ فِي الفَرِيقِ أَرْبَعَةُ طُلَّابٍ. اخْتَرْتُ سَارَةَ لِلرَّسْمِ لِأَنَّهَا مُبْدِعَةٌ، وَيُوسُفَ لِلْحِسَابَاتِ لِأَنَّهُ دَقِيقٌ. عَمِلْنَا مَعًا ثَلَاثَةَ أَسَابِيعَ، وَحَصَلْنَا عَلَى أَعْلَى دَرَجَةٍ فِي الصَّفِّ. كُنْتُ فَخُورًا بِفَرِيقِي.</a:t>
@@ -8378,6 +8434,7 @@
                   <a:srgbClr val="1F2A37"/>
                 </a:solidFill>
                 <a:latin typeface="Amiri" pitchFamily="2" charset="-78"/>
+                <a:ea typeface="Amiri" pitchFamily="2" charset="-78"/>
                 <a:cs typeface="Amiri" pitchFamily="2" charset="-78"/>
               </a:rPr>
               <a:t>فِي رَأْيِي، الصِّفَاتُ الشَّخْصِيَّةُ مُهِمَّةٌ جِدًّا فِي العَمَلِ. المُهَنْدِسُ يَحْتَاجُ إِلَى الدِّقَّةِ، وَالمُعَلِّمُ يَحْتَاجُ إِلَى الصَّبْرِ. فِي المُسْتَقْبَلِ أُرِيدُ أَنْ أَكُونَ مُدِيرَ مَشَارِيعَ، لِأَنِّي مُنَظَّمٌ وَأُحِبُّ القِيَادَةَ وَالعَمَلَ مَعَ النَّاسِ.</a:t>
@@ -8541,11 +8598,12 @@
               <a:buNone/>
             </a:pPr>
             <a:r>
-              <a:rPr lang="en-US" sz="950" b="1" dirty="0">
+              <a:rPr lang="ar-SA" sz="950" b="1" dirty="0">
                 <a:solidFill>
                   <a:srgbClr val="FFFFFF"/>
                 </a:solidFill>
                 <a:latin typeface="Calibri" pitchFamily="34" charset="0"/>
+                <a:ea typeface="Amiri" pitchFamily="2" charset="-78"/>
                 <a:cs typeface="Amiri" pitchFamily="2" charset="-78"/>
               </a:rPr>
               <a:t>فَمَثَلًا أَكْتُبُ</a:t>
@@ -8606,11 +8664,12 @@
               <a:buNone/>
             </a:pPr>
             <a:r>
-              <a:rPr lang="en-US" sz="950" b="1" dirty="0">
+              <a:rPr lang="ar-SA" sz="950" b="1" dirty="0">
                 <a:solidFill>
                   <a:srgbClr val="FFFFFF"/>
                 </a:solidFill>
                 <a:latin typeface="Calibri" pitchFamily="34" charset="0"/>
+                <a:ea typeface="Amiri" pitchFamily="2" charset="-78"/>
                 <a:cs typeface="Amiri" pitchFamily="2" charset="-78"/>
               </a:rPr>
               <a:t>لِكَيْ أَتَحَكَّمَ</a:t>
@@ -8671,11 +8730,12 @@
               <a:buNone/>
             </a:pPr>
             <a:r>
-              <a:rPr lang="en-US" sz="950" b="1" dirty="0">
+              <a:rPr lang="ar-SA" sz="950" b="1" dirty="0">
                 <a:solidFill>
                   <a:srgbClr val="FFFFFF"/>
                 </a:solidFill>
                 <a:latin typeface="Calibri" pitchFamily="34" charset="0"/>
+                <a:ea typeface="Amiri" pitchFamily="2" charset="-78"/>
                 <a:cs typeface="Amiri" pitchFamily="2" charset="-78"/>
               </a:rPr>
               <a:t>لِأَنَّهَا مُبْدِعَةٌ</a:t>
@@ -8736,11 +8796,12 @@
               <a:buNone/>
             </a:pPr>
             <a:r>
-              <a:rPr lang="en-US" sz="950" b="1" dirty="0">
+              <a:rPr lang="ar-SA" sz="950" b="1" dirty="0">
                 <a:solidFill>
                   <a:srgbClr val="FFFFFF"/>
                 </a:solidFill>
                 <a:latin typeface="Calibri" pitchFamily="34" charset="0"/>
+                <a:ea typeface="Amiri" pitchFamily="2" charset="-78"/>
                 <a:cs typeface="Amiri" pitchFamily="2" charset="-78"/>
               </a:rPr>
               <a:t>يَحْتَاجُ إِلَى الدِّقَّةِ</a:t>
@@ -8874,6 +8935,7 @@
                   <a:srgbClr val="D4AF37"/>
                 </a:solidFill>
                 <a:latin typeface="Amiri" pitchFamily="2" charset="-78"/>
+                <a:ea typeface="Amiri" pitchFamily="2" charset="-78"/>
                 <a:cs typeface="Amiri" pitchFamily="2" charset="-78"/>
               </a:rPr>
               <a:t>م</a:t>
@@ -9131,6 +9193,7 @@
                   <a:srgbClr val="8A6D1E"/>
                 </a:solidFill>
                 <a:latin typeface="Amiri" pitchFamily="2" charset="-78"/>
+                <a:ea typeface="Amiri" pitchFamily="2" charset="-78"/>
                 <a:cs typeface="Amiri" pitchFamily="2" charset="-78"/>
               </a:rPr>
               <a:t>أ</a:t>
@@ -9195,6 +9258,7 @@
                   <a:srgbClr val="1B3B6F"/>
                 </a:solidFill>
                 <a:latin typeface="Amiri" pitchFamily="2" charset="-78"/>
+                <a:ea typeface="Amiri" pitchFamily="2" charset="-78"/>
                 <a:cs typeface="Amiri" pitchFamily="2" charset="-78"/>
               </a:rPr>
               <a:t>أ</a:t>
@@ -9246,6 +9310,7 @@
                   <a:srgbClr val="8A6D1E"/>
                 </a:solidFill>
                 <a:latin typeface="Amiri" pitchFamily="2" charset="-78"/>
+                <a:ea typeface="Amiri" pitchFamily="2" charset="-78"/>
                 <a:cs typeface="Amiri" pitchFamily="2" charset="-78"/>
               </a:rPr>
               <a:t>نَمُوذَجُ الإِجَابَةِ</a:t>
@@ -9359,6 +9424,7 @@
                   <a:srgbClr val="1F2A37"/>
                 </a:solidFill>
                 <a:latin typeface="Amiri" pitchFamily="2" charset="-78"/>
+                <a:ea typeface="Amiri" pitchFamily="2" charset="-78"/>
                 <a:cs typeface="Amiri" pitchFamily="2" charset="-78"/>
               </a:rPr>
               <a:t>يَصِفُنِي أَصْدِقَائِي بِأَنَّنِي "الشَّخْصُ الَّذِي يَعْرِفُ دَائِمًا أَيْنَ وَضَعَ كُلَّ شَيْءٍ"، وَأَظُنُّ أَنَّ التَّنْظِيمَ فِعْلًا أَقْوَى صِفَاتِي؛ فَأَنَا أُخَطِّطُ لِأُسْبُوعِي كُلَّ أَحَدٍ، وَأُقَسِّمُ المَشَارِيعَ الكَبِيرَةَ إِلَى مَهَامَّ صَغِيرَةٍ، وَأَضَعُ لِكُلِّ مُهِمَّةٍ مَوْعِدًا دَقِيقًا.</a:t>
@@ -9378,6 +9444,7 @@
                   <a:srgbClr val="1F2A37"/>
                 </a:solidFill>
                 <a:latin typeface="Amiri" pitchFamily="2" charset="-78"/>
+                <a:ea typeface="Amiri" pitchFamily="2" charset="-78"/>
                 <a:cs typeface="Amiri" pitchFamily="2" charset="-78"/>
               </a:rPr>
               <a:t>غَيْرَ أَنَّ هٰذِهِ الصِّفَةَ كَانَتْ لَهَا عُيُوبُهَا؛ فَقَدْ كُنْتُ أَنْزَعِجُ كَثِيرًا عِنْدَمَا لَا يَلْتَزِمُ زُمَلَائِي بِخُطَّتِي، وَأُرِيدُ أَنْ يَعْمَلَ الجَمِيعُ بِطَرِيقَتِي، إِلَى أَنْ تَعَلَّمْتُ دَرْسًا مُهِمًّا فِي مَشْرُوعِ العُلُومِ العَامَ المَاضِي.</a:t>
@@ -9397,6 +9464,7 @@
                   <a:srgbClr val="1F2A37"/>
                 </a:solidFill>
                 <a:latin typeface="Amiri" pitchFamily="2" charset="-78"/>
+                <a:ea typeface="Amiri" pitchFamily="2" charset="-78"/>
                 <a:cs typeface="Amiri" pitchFamily="2" charset="-78"/>
               </a:rPr>
               <a:t>كَانَ فِي فَرِيقِي طَالِبٌ يَبْدُو فَوْضَوِيًّا جِدًّا، لَا يُسَلِّمُ شَيْئًا فِي مَوْعِدِهِ أَبَدًا، لٰكِنَّهُ كَانَ أَكْثَرَنَا إِبْدَاعًا. وَعِنْدَمَا تَرَكْتُ لَهُ حُرِّيَّةَ تَصْمِيمِ العَرْضِ بِطَرِيقَتِهِ، قَدَّمَ فِكْرَةً جَعَلَتْ مَشْرُوعَنَا الأَفْضَلَ فِي المَدْرَسَةِ، وَأَدْهَشَتِ المُعَلِّمِينَ جَمِيعًا.</a:t>
@@ -9416,6 +9484,7 @@
                   <a:srgbClr val="1F2A37"/>
                 </a:solidFill>
                 <a:latin typeface="Amiri" pitchFamily="2" charset="-78"/>
+                <a:ea typeface="Amiri" pitchFamily="2" charset="-78"/>
                 <a:cs typeface="Amiri" pitchFamily="2" charset="-78"/>
               </a:rPr>
               <a:t>صَحِيحٌ أَنَّ لِكُلِّ مِهْنَةٍ صِفَاتٍ تَحْتَاجُ إِلَيْهَا، غَيْرَ أَنَّ أَنْجَحَ الفِرَقِ هِيَ الَّتِي تَجْمَعُ شَخْصِيَّاتٍ مُخْتَلِفَةً. وَلَوْ كَانَ كُلُّ أَعْضَاءِ الفَرِيقِ مِثْلِي تَمَامًا، لَكَانَ عَمَلُنَا مُنَظَّمًا جِدًّا، لٰكِنَّهُ بِلَا رُوحٍ وَلَا إِبْدَاعٍ.</a:t>
@@ -9514,11 +9583,12 @@
               <a:buNone/>
             </a:pPr>
             <a:r>
-              <a:rPr lang="en-US" sz="950" b="1" dirty="0">
+              <a:rPr lang="ar-SA" sz="950" b="1" dirty="0">
                 <a:solidFill>
                   <a:srgbClr val="FFFFFF"/>
                 </a:solidFill>
                 <a:latin typeface="Calibri" pitchFamily="34" charset="0"/>
+                <a:ea typeface="Amiri" pitchFamily="2" charset="-78"/>
                 <a:cs typeface="Amiri" pitchFamily="2" charset="-78"/>
               </a:rPr>
               <a:t>يَصِفُنِي … بِأَنَّنِي</a:t>
@@ -9579,11 +9649,12 @@
               <a:buNone/>
             </a:pPr>
             <a:r>
-              <a:rPr lang="en-US" sz="950" b="1" dirty="0">
+              <a:rPr lang="ar-SA" sz="950" b="1" dirty="0">
                 <a:solidFill>
                   <a:srgbClr val="FFFFFF"/>
                 </a:solidFill>
                 <a:latin typeface="Calibri" pitchFamily="34" charset="0"/>
+                <a:ea typeface="Amiri" pitchFamily="2" charset="-78"/>
                 <a:cs typeface="Amiri" pitchFamily="2" charset="-78"/>
               </a:rPr>
               <a:t>كُنْتُ أَنْزَعِجُ</a:t>
@@ -9644,11 +9715,12 @@
               <a:buNone/>
             </a:pPr>
             <a:r>
-              <a:rPr lang="en-US" sz="950" b="1" dirty="0">
+              <a:rPr lang="ar-SA" sz="950" b="1" dirty="0">
                 <a:solidFill>
                   <a:srgbClr val="FFFFFF"/>
                 </a:solidFill>
                 <a:latin typeface="Calibri" pitchFamily="34" charset="0"/>
+                <a:ea typeface="Amiri" pitchFamily="2" charset="-78"/>
                 <a:cs typeface="Amiri" pitchFamily="2" charset="-78"/>
               </a:rPr>
               <a:t>أَكْثَرَنَا إِبْدَاعًا</a:t>
@@ -9709,11 +9781,12 @@
               <a:buNone/>
             </a:pPr>
             <a:r>
-              <a:rPr lang="en-US" sz="950" b="1" dirty="0">
+              <a:rPr lang="ar-SA" sz="950" b="1" dirty="0">
                 <a:solidFill>
                   <a:srgbClr val="FFFFFF"/>
                 </a:solidFill>
                 <a:latin typeface="Calibri" pitchFamily="34" charset="0"/>
+                <a:ea typeface="Amiri" pitchFamily="2" charset="-78"/>
                 <a:cs typeface="Amiri" pitchFamily="2" charset="-78"/>
               </a:rPr>
               <a:t>لَوْ كَانَ … لَكَانَ</a:t>
@@ -9847,6 +9920,7 @@
                   <a:srgbClr val="D4AF37"/>
                 </a:solidFill>
                 <a:latin typeface="Amiri" pitchFamily="2" charset="-78"/>
+                <a:ea typeface="Amiri" pitchFamily="2" charset="-78"/>
                 <a:cs typeface="Amiri" pitchFamily="2" charset="-78"/>
               </a:rPr>
               <a:t>م</a:t>
@@ -10104,6 +10178,7 @@
                   <a:srgbClr val="8A6D1E"/>
                 </a:solidFill>
                 <a:latin typeface="Amiri" pitchFamily="2" charset="-78"/>
+                <a:ea typeface="Amiri" pitchFamily="2" charset="-78"/>
                 <a:cs typeface="Amiri" pitchFamily="2" charset="-78"/>
               </a:rPr>
               <a:t>ب</a:t>
@@ -10168,6 +10243,7 @@
                   <a:srgbClr val="1B3B6F"/>
                 </a:solidFill>
                 <a:latin typeface="Amiri" pitchFamily="2" charset="-78"/>
+                <a:ea typeface="Amiri" pitchFamily="2" charset="-78"/>
                 <a:cs typeface="Amiri" pitchFamily="2" charset="-78"/>
               </a:rPr>
               <a:t>ب</a:t>
@@ -10219,6 +10295,7 @@
                   <a:srgbClr val="8A6D1E"/>
                 </a:solidFill>
                 <a:latin typeface="Amiri" pitchFamily="2" charset="-78"/>
+                <a:ea typeface="Amiri" pitchFamily="2" charset="-78"/>
                 <a:cs typeface="Amiri" pitchFamily="2" charset="-78"/>
               </a:rPr>
               <a:t>نَمُوذَجُ الإِجَابَةِ</a:t>
@@ -10332,6 +10409,7 @@
                   <a:srgbClr val="1F2A37"/>
                 </a:solidFill>
                 <a:latin typeface="Amiri" pitchFamily="2" charset="-78"/>
+                <a:ea typeface="Amiri" pitchFamily="2" charset="-78"/>
                 <a:cs typeface="Amiri" pitchFamily="2" charset="-78"/>
               </a:rPr>
               <a:t>يَعْتَقِدُ كَثِيرُونَ أَنَّ الشَّهَادَةَ الجَامِعِيَّةَ هِيَ مِفْتَاحُ النَّجَاحِ الوَحِيدُ، غَيْرَ أَنَّ أَصْحَابَ العَمَلِ اليَوْمَ يَبْحَثُونَ عَنْ شَيْءٍ آخَرَ أَيْضًا: الصِّفَاتِ الشَّخْصِيَّةِ الَّتِي لَا تُكْتَبُ فِي أَيِّ شَهَادَةٍ.</a:t>
@@ -10351,6 +10429,7 @@
                   <a:srgbClr val="1F2A37"/>
                 </a:solidFill>
                 <a:latin typeface="Amiri" pitchFamily="2" charset="-78"/>
+                <a:ea typeface="Amiri" pitchFamily="2" charset="-78"/>
                 <a:cs typeface="Amiri" pitchFamily="2" charset="-78"/>
               </a:rPr>
               <a:t>مِنْ نَاحِيَةٍ، لَا يُمْكِنُ لِلطَّبِيبِ أَوِ المُهَنْدِسِ أَنْ يَعْمَلَ دُونَ مَعْرِفَةٍ عِلْمِيَّةٍ عَمِيقَةٍ تُثْبِتُهَا الشَّهَادَاتُ. وَمِنْ نَاحِيَةٍ أُخْرَى، تُشِيرُ دِرَاسَاتٌ إِلَى أَنَّ مُعْظَمَ الَّذِينَ يَفْقِدُونَ وَظَائِفَهُمْ لَا يَفْقِدُونَهَا بِسَبَبِ نَقْصِ المَعْرِفَةِ، بَلْ بِسَبَبِ ضَعْفِ التَّوَاصُلِ أَوْ عَدَمِ القُدْرَةِ عَلَى العَمَلِ فِي فَرِيقٍ.</a:t>
@@ -10370,6 +10449,7 @@
                   <a:srgbClr val="1F2A37"/>
                 </a:solidFill>
                 <a:latin typeface="Amiri" pitchFamily="2" charset="-78"/>
+                <a:ea typeface="Amiri" pitchFamily="2" charset="-78"/>
                 <a:cs typeface="Amiri" pitchFamily="2" charset="-78"/>
               </a:rPr>
               <a:t>وَقَدْ رَأَيْتُ ذٰلِكَ فِي تَجْرِبَةِ عَمِّي، الَّذِي يُدِيرُ شَرِكَةً صَغِيرَةً؛ فَقَدْ وَظَّفَ مَرَّةً مُهَنْدِسًا يَحْمِلُ شَهَادَاتٍ مُمْتَازَةً، لٰكِنَّهُ كَانَ يَرْفُضُ الاسْتِمَاعَ إِلَى زُمَلَائِهِ، فَاضْطُرَّ عَمِّي إِلَى إِنْهَاءِ عَقْدِهِ بَعْدَ أَشْهُرٍ.</a:t>
@@ -10389,6 +10469,7 @@
                   <a:srgbClr val="1F2A37"/>
                 </a:solidFill>
                 <a:latin typeface="Amiri" pitchFamily="2" charset="-78"/>
+                <a:ea typeface="Amiri" pitchFamily="2" charset="-78"/>
                 <a:cs typeface="Amiri" pitchFamily="2" charset="-78"/>
               </a:rPr>
               <a:t>صَحِيحٌ أَنَّ المَعْرِفَةَ أَسَاسٌ لَا غِنَى عَنْهُ، غَيْرَ أَنَّ الصِّفَاتِ هِيَ الَّتِي تَبْنِي عَلَيْهِ. وَإِذَا اهْتَمَّتِ المَدَارِسُ بِتَنْمِيَةِ الشَّخْصِيَّةِ كَمَا تَهْتَمُّ بِالدَّرَجَاتِ، فَسَنَحْصُلُ عَلَى جِيلٍ نَاجِحٍ فِي العَمَلِ وَفِي الحَيَاةِ مَعًا.</a:t>
@@ -10487,11 +10568,12 @@
               <a:buNone/>
             </a:pPr>
             <a:r>
-              <a:rPr lang="en-US" sz="950" b="1" dirty="0">
+              <a:rPr lang="ar-SA" sz="950" b="1" dirty="0">
                 <a:solidFill>
                   <a:srgbClr val="FFFFFF"/>
                 </a:solidFill>
                 <a:latin typeface="Calibri" pitchFamily="34" charset="0"/>
+                <a:ea typeface="Amiri" pitchFamily="2" charset="-78"/>
                 <a:cs typeface="Amiri" pitchFamily="2" charset="-78"/>
               </a:rPr>
               <a:t>الَّتِي لَا تُكْتَبُ</a:t>
@@ -10552,11 +10634,12 @@
               <a:buNone/>
             </a:pPr>
             <a:r>
-              <a:rPr lang="en-US" sz="950" b="1" dirty="0">
+              <a:rPr lang="ar-SA" sz="950" b="1" dirty="0">
                 <a:solidFill>
                   <a:srgbClr val="FFFFFF"/>
                 </a:solidFill>
                 <a:latin typeface="Calibri" pitchFamily="34" charset="0"/>
+                <a:ea typeface="Amiri" pitchFamily="2" charset="-78"/>
                 <a:cs typeface="Amiri" pitchFamily="2" charset="-78"/>
               </a:rPr>
               <a:t>لَا يَفْقِدُونَهَا … بَلْ</a:t>
@@ -10617,11 +10700,12 @@
               <a:buNone/>
             </a:pPr>
             <a:r>
-              <a:rPr lang="en-US" sz="950" b="1" dirty="0">
+              <a:rPr lang="ar-SA" sz="950" b="1" dirty="0">
                 <a:solidFill>
                   <a:srgbClr val="FFFFFF"/>
                 </a:solidFill>
                 <a:latin typeface="Calibri" pitchFamily="34" charset="0"/>
+                <a:ea typeface="Amiri" pitchFamily="2" charset="-78"/>
                 <a:cs typeface="Amiri" pitchFamily="2" charset="-78"/>
               </a:rPr>
               <a:t>فَاضْطُرَّ عَمِّي</a:t>
@@ -10682,11 +10766,12 @@
               <a:buNone/>
             </a:pPr>
             <a:r>
-              <a:rPr lang="en-US" sz="950" b="1" dirty="0">
+              <a:rPr lang="ar-SA" sz="950" b="1" dirty="0">
                 <a:solidFill>
                   <a:srgbClr val="FFFFFF"/>
                 </a:solidFill>
                 <a:latin typeface="Calibri" pitchFamily="34" charset="0"/>
+                <a:ea typeface="Amiri" pitchFamily="2" charset="-78"/>
                 <a:cs typeface="Amiri" pitchFamily="2" charset="-78"/>
               </a:rPr>
               <a:t>إِذَا اهْتَمَّتْ … فَسَنَحْصُلُ</a:t>
@@ -10820,6 +10905,7 @@
                   <a:srgbClr val="D4AF37"/>
                 </a:solidFill>
                 <a:latin typeface="Amiri" pitchFamily="2" charset="-78"/>
+                <a:ea typeface="Amiri" pitchFamily="2" charset="-78"/>
                 <a:cs typeface="Amiri" pitchFamily="2" charset="-78"/>
               </a:rPr>
               <a:t>م</a:t>
@@ -11140,6 +11226,7 @@
                   <a:srgbClr val="8A6D1E"/>
                 </a:solidFill>
                 <a:latin typeface="Amiri" pitchFamily="2" charset="-78"/>
+                <a:ea typeface="Amiri" pitchFamily="2" charset="-78"/>
                 <a:cs typeface="Amiri" pitchFamily="2" charset="-78"/>
               </a:rPr>
               <a:t>قَيِّمْ عَمَلَكَ</a:t>
@@ -12384,6 +12471,7 @@
                   <a:srgbClr val="FFFFFF"/>
                 </a:solidFill>
                 <a:latin typeface="Amiri" pitchFamily="2" charset="-78"/>
+                <a:ea typeface="Amiri" pitchFamily="2" charset="-78"/>
                 <a:cs typeface="Amiri" pitchFamily="2" charset="-78"/>
               </a:rPr>
               <a:t>أَحْسَنْتُمْ! إِلَى اللِّقَاءِ</a:t>
@@ -12536,6 +12624,7 @@
                   <a:srgbClr val="D4AF37"/>
                 </a:solidFill>
                 <a:latin typeface="Amiri" pitchFamily="2" charset="-78"/>
+                <a:ea typeface="Amiri" pitchFamily="2" charset="-78"/>
                 <a:cs typeface="Amiri" pitchFamily="2" charset="-78"/>
               </a:rPr>
               <a:t>وَرْشَةُ التَّدْرِيبِ</a:t>
@@ -12669,6 +12758,7 @@
                   <a:srgbClr val="D4AF37"/>
                 </a:solidFill>
                 <a:latin typeface="Amiri" pitchFamily="2" charset="-78"/>
+                <a:ea typeface="Amiri" pitchFamily="2" charset="-78"/>
                 <a:cs typeface="Amiri" pitchFamily="2" charset="-78"/>
               </a:rPr>
               <a:t>م</a:t>
@@ -12989,6 +13079,7 @@
                   <a:srgbClr val="8A6D1E"/>
                 </a:solidFill>
                 <a:latin typeface="Amiri" pitchFamily="2" charset="-78"/>
+                <a:ea typeface="Amiri" pitchFamily="2" charset="-78"/>
                 <a:cs typeface="Amiri" pitchFamily="2" charset="-78"/>
               </a:rPr>
               <a:t>آدَابُ الصَّفِّ</a:t>
@@ -14520,6 +14611,7 @@
                   <a:srgbClr val="D4AF37"/>
                 </a:solidFill>
                 <a:latin typeface="Amiri" pitchFamily="2" charset="-78"/>
+                <a:ea typeface="Amiri" pitchFamily="2" charset="-78"/>
                 <a:cs typeface="Amiri" pitchFamily="2" charset="-78"/>
               </a:rPr>
               <a:t>م</a:t>
@@ -14840,6 +14932,7 @@
                   <a:srgbClr val="8A6D1E"/>
                 </a:solidFill>
                 <a:latin typeface="Amiri" pitchFamily="2" charset="-78"/>
+                <a:ea typeface="Amiri" pitchFamily="2" charset="-78"/>
                 <a:cs typeface="Amiri" pitchFamily="2" charset="-78"/>
               </a:rPr>
               <a:t>خَرِيطَةُ الوَرْشَةِ</a:t>
@@ -15154,6 +15247,7 @@
                   <a:srgbClr val="1B3B6F"/>
                 </a:solidFill>
                 <a:latin typeface="Amiri" pitchFamily="2" charset="-78"/>
+                <a:ea typeface="Amiri" pitchFamily="2" charset="-78"/>
                 <a:cs typeface="Amiri" pitchFamily="2" charset="-78"/>
               </a:rPr>
               <a:t>كَيْفَ</a:t>
@@ -15430,6 +15524,7 @@
                   <a:srgbClr val="1E6B52"/>
                 </a:solidFill>
                 <a:latin typeface="Amiri" pitchFamily="2" charset="-78"/>
+                <a:ea typeface="Amiri" pitchFamily="2" charset="-78"/>
                 <a:cs typeface="Amiri" pitchFamily="2" charset="-78"/>
               </a:rPr>
               <a:t>الاسْتِمَارَةُ</a:t>
@@ -15706,6 +15801,7 @@
                   <a:srgbClr val="1E6B52"/>
                 </a:solidFill>
                 <a:latin typeface="Amiri" pitchFamily="2" charset="-78"/>
+                <a:ea typeface="Amiri" pitchFamily="2" charset="-78"/>
                 <a:cs typeface="Amiri" pitchFamily="2" charset="-78"/>
               </a:rPr>
               <a:t>الرِّسَالَةُ</a:t>
@@ -15982,6 +16078,7 @@
                   <a:srgbClr val="1E6B52"/>
                 </a:solidFill>
                 <a:latin typeface="Amiri" pitchFamily="2" charset="-78"/>
+                <a:ea typeface="Amiri" pitchFamily="2" charset="-78"/>
                 <a:cs typeface="Amiri" pitchFamily="2" charset="-78"/>
               </a:rPr>
               <a:t>المَقَالُ</a:t>
@@ -16258,6 +16355,7 @@
                   <a:srgbClr val="8A6D1E"/>
                 </a:solidFill>
                 <a:latin typeface="Amiri" pitchFamily="2" charset="-78"/>
+                <a:ea typeface="Amiri" pitchFamily="2" charset="-78"/>
                 <a:cs typeface="Amiri" pitchFamily="2" charset="-78"/>
               </a:rPr>
               <a:t>قَيِّمْ</a:t>
@@ -16501,6 +16599,7 @@
                   <a:srgbClr val="D4AF37"/>
                 </a:solidFill>
                 <a:latin typeface="Amiri" pitchFamily="2" charset="-78"/>
+                <a:ea typeface="Amiri" pitchFamily="2" charset="-78"/>
                 <a:cs typeface="Amiri" pitchFamily="2" charset="-78"/>
               </a:rPr>
               <a:t>م</a:t>
@@ -16821,6 +16920,7 @@
                   <a:srgbClr val="8A6D1E"/>
                 </a:solidFill>
                 <a:latin typeface="Amiri" pitchFamily="2" charset="-78"/>
+                <a:ea typeface="Amiri" pitchFamily="2" charset="-78"/>
                 <a:cs typeface="Amiri" pitchFamily="2" charset="-78"/>
               </a:rPr>
               <a:t>امْتِحَانُ الكِتَابَةِ</a:t>
@@ -17445,6 +17545,7 @@
                   <a:srgbClr val="1B3B6F"/>
                 </a:solidFill>
                 <a:latin typeface="Amiri" pitchFamily="2" charset="-78"/>
+                <a:ea typeface="Amiri" pitchFamily="2" charset="-78"/>
                 <a:cs typeface="Amiri" pitchFamily="2" charset="-78"/>
               </a:rPr>
               <a:t>أَنَا صَبُورَةٌ وَمُنَظَّمَةٌ وَاجْتِمَاعِيَّةٌ</a:t>
@@ -17544,6 +17645,7 @@
                   <a:srgbClr val="1B3B6F"/>
                 </a:solidFill>
                 <a:latin typeface="Amiri" pitchFamily="2" charset="-78"/>
+                <a:ea typeface="Amiri" pitchFamily="2" charset="-78"/>
                 <a:cs typeface="Amiri" pitchFamily="2" charset="-78"/>
               </a:rPr>
               <a:t>الصِّفَاتُ الَّتِي يَحْتَاجُ إِلَيْهَا المُعَلِّمُ</a:t>
@@ -17643,6 +17745,7 @@
                   <a:srgbClr val="1B3B6F"/>
                 </a:solidFill>
                 <a:latin typeface="Amiri" pitchFamily="2" charset="-78"/>
+                <a:ea typeface="Amiri" pitchFamily="2" charset="-78"/>
                 <a:cs typeface="Amiri" pitchFamily="2" charset="-78"/>
               </a:rPr>
               <a:t>أَنَا مُنَظَّمٌ؛ فَمَثَلًا أَكْتُبُ جَدْوَلًا كُلَّ أُسْبُوعٍ</a:t>
@@ -17814,6 +17917,7 @@
                   <a:srgbClr val="D4AF37"/>
                 </a:solidFill>
                 <a:latin typeface="Amiri" pitchFamily="2" charset="-78"/>
+                <a:ea typeface="Amiri" pitchFamily="2" charset="-78"/>
                 <a:cs typeface="Amiri" pitchFamily="2" charset="-78"/>
               </a:rPr>
               <a:t>م</a:t>
@@ -18134,6 +18238,7 @@
                   <a:srgbClr val="8A6D1E"/>
                 </a:solidFill>
                 <a:latin typeface="Amiri" pitchFamily="2" charset="-78"/>
+                <a:ea typeface="Amiri" pitchFamily="2" charset="-78"/>
                 <a:cs typeface="Amiri" pitchFamily="2" charset="-78"/>
               </a:rPr>
               <a:t>مَلَفُّ التَّقْيِيمِ الذَّاتِيِّ</a:t>
@@ -18490,6 +18595,7 @@
                   <a:srgbClr val="1B3B6F"/>
                 </a:solidFill>
                 <a:latin typeface="Amiri" pitchFamily="2" charset="-78"/>
+                <a:ea typeface="Amiri" pitchFamily="2" charset="-78"/>
                 <a:cs typeface="Amiri" pitchFamily="2" charset="-78"/>
               </a:rPr>
               <a:t>الاسْمُ</a:t>
@@ -18734,6 +18840,7 @@
                   <a:srgbClr val="1B3B6F"/>
                 </a:solidFill>
                 <a:latin typeface="Amiri" pitchFamily="2" charset="-78"/>
+                <a:ea typeface="Amiri" pitchFamily="2" charset="-78"/>
                 <a:cs typeface="Amiri" pitchFamily="2" charset="-78"/>
               </a:rPr>
               <a:t>ثَلَاثُ صِفَاتٍ</a:t>
@@ -18978,6 +19085,7 @@
                   <a:srgbClr val="1B3B6F"/>
                 </a:solidFill>
                 <a:latin typeface="Amiri" pitchFamily="2" charset="-78"/>
+                <a:ea typeface="Amiri" pitchFamily="2" charset="-78"/>
                 <a:cs typeface="Amiri" pitchFamily="2" charset="-78"/>
               </a:rPr>
               <a:t>نُقْطَةُ قُوَّةٍ</a:t>
@@ -19222,6 +19330,7 @@
                   <a:srgbClr val="1B3B6F"/>
                 </a:solidFill>
                 <a:latin typeface="Amiri" pitchFamily="2" charset="-78"/>
+                <a:ea typeface="Amiri" pitchFamily="2" charset="-78"/>
                 <a:cs typeface="Amiri" pitchFamily="2" charset="-78"/>
               </a:rPr>
               <a:t>نُقْطَةُ ضَعْفٍ</a:t>
@@ -19466,6 +19575,7 @@
                   <a:srgbClr val="1B3B6F"/>
                 </a:solidFill>
                 <a:latin typeface="Amiri" pitchFamily="2" charset="-78"/>
+                <a:ea typeface="Amiri" pitchFamily="2" charset="-78"/>
                 <a:cs typeface="Amiri" pitchFamily="2" charset="-78"/>
               </a:rPr>
               <a:t>نَشَاطٌ يُظْهِرُ صِفَاتِكَ</a:t>
@@ -19710,6 +19820,7 @@
                   <a:srgbClr val="1B3B6F"/>
                 </a:solidFill>
                 <a:latin typeface="Amiri" pitchFamily="2" charset="-78"/>
+                <a:ea typeface="Amiri" pitchFamily="2" charset="-78"/>
                 <a:cs typeface="Amiri" pitchFamily="2" charset="-78"/>
               </a:rPr>
               <a:t>وَظِيفَةٌ تُنَاسِبُكَ</a:t>
@@ -19954,6 +20065,7 @@
                   <a:srgbClr val="1B3B6F"/>
                 </a:solidFill>
                 <a:latin typeface="Amiri" pitchFamily="2" charset="-78"/>
+                <a:ea typeface="Amiri" pitchFamily="2" charset="-78"/>
                 <a:cs typeface="Amiri" pitchFamily="2" charset="-78"/>
               </a:rPr>
               <a:t>صِفَةٌ تُرِيدُ أَنْ تُطَوِّرَهَا</a:t>
@@ -20133,6 +20245,7 @@
                   <a:srgbClr val="1B3B6F"/>
                 </a:solidFill>
                 <a:latin typeface="Amiri" pitchFamily="2" charset="-78"/>
+                <a:ea typeface="Amiri" pitchFamily="2" charset="-78"/>
                 <a:cs typeface="Amiri" pitchFamily="2" charset="-78"/>
               </a:rPr>
               <a:t>جُمْلَةٌ: لِمَاذَا تُنَاسِبُكَ هٰذِهِ الوَظِيفَةُ؟</a:t>
@@ -20342,6 +20455,7 @@
                   <a:srgbClr val="D4AF37"/>
                 </a:solidFill>
                 <a:latin typeface="Amiri" pitchFamily="2" charset="-78"/>
+                <a:ea typeface="Amiri" pitchFamily="2" charset="-78"/>
                 <a:cs typeface="Amiri" pitchFamily="2" charset="-78"/>
               </a:rPr>
               <a:t>م</a:t>
@@ -20662,6 +20776,7 @@
                   <a:srgbClr val="8A6D1E"/>
                 </a:solidFill>
                 <a:latin typeface="Amiri" pitchFamily="2" charset="-78"/>
+                <a:ea typeface="Amiri" pitchFamily="2" charset="-78"/>
                 <a:cs typeface="Amiri" pitchFamily="2" charset="-78"/>
               </a:rPr>
               <a:t>نَمُوذَجُ الإِجَابَةِ</a:t>
@@ -20980,6 +21095,7 @@
                   <a:srgbClr val="1B3B6F"/>
                 </a:solidFill>
                 <a:latin typeface="Amiri" pitchFamily="2" charset="-78"/>
+                <a:ea typeface="Amiri" pitchFamily="2" charset="-78"/>
                 <a:cs typeface="Amiri" pitchFamily="2" charset="-78"/>
               </a:rPr>
               <a:t>لَيْلَى حَسَنٌ</a:t>
@@ -21018,6 +21134,7 @@
                   <a:srgbClr val="1B3B6F"/>
                 </a:solidFill>
                 <a:latin typeface="Amiri" pitchFamily="2" charset="-78"/>
+                <a:ea typeface="Amiri" pitchFamily="2" charset="-78"/>
                 <a:cs typeface="Amiri" pitchFamily="2" charset="-78"/>
               </a:rPr>
               <a:t>الاسْمُ</a:t>
@@ -21159,6 +21276,7 @@
                   <a:srgbClr val="1B3B6F"/>
                 </a:solidFill>
                 <a:latin typeface="Amiri" pitchFamily="2" charset="-78"/>
+                <a:ea typeface="Amiri" pitchFamily="2" charset="-78"/>
                 <a:cs typeface="Amiri" pitchFamily="2" charset="-78"/>
               </a:rPr>
               <a:t>صَبُورَةٌ، مُنَظَّمَةٌ، اجْتِمَاعِيَّةٌ</a:t>
@@ -21197,6 +21315,7 @@
                   <a:srgbClr val="1B3B6F"/>
                 </a:solidFill>
                 <a:latin typeface="Amiri" pitchFamily="2" charset="-78"/>
+                <a:ea typeface="Amiri" pitchFamily="2" charset="-78"/>
                 <a:cs typeface="Amiri" pitchFamily="2" charset="-78"/>
               </a:rPr>
               <a:t>ثَلَاثُ صِفَاتٍ</a:t>
@@ -21338,6 +21457,7 @@
                   <a:srgbClr val="1B3B6F"/>
                 </a:solidFill>
                 <a:latin typeface="Amiri" pitchFamily="2" charset="-78"/>
+                <a:ea typeface="Amiri" pitchFamily="2" charset="-78"/>
                 <a:cs typeface="Amiri" pitchFamily="2" charset="-78"/>
               </a:rPr>
               <a:t>التَّوَاصُلُ مَعَ الأَطْفَالِ</a:t>
@@ -21376,6 +21496,7 @@
                   <a:srgbClr val="1B3B6F"/>
                 </a:solidFill>
                 <a:latin typeface="Amiri" pitchFamily="2" charset="-78"/>
+                <a:ea typeface="Amiri" pitchFamily="2" charset="-78"/>
                 <a:cs typeface="Amiri" pitchFamily="2" charset="-78"/>
               </a:rPr>
               <a:t>نُقْطَةُ قُوَّةٍ</a:t>
@@ -21517,6 +21638,7 @@
                   <a:srgbClr val="1B3B6F"/>
                 </a:solidFill>
                 <a:latin typeface="Amiri" pitchFamily="2" charset="-78"/>
+                <a:ea typeface="Amiri" pitchFamily="2" charset="-78"/>
                 <a:cs typeface="Amiri" pitchFamily="2" charset="-78"/>
               </a:rPr>
               <a:t>الخَجَلُ</a:t>
@@ -21555,6 +21677,7 @@
                   <a:srgbClr val="1B3B6F"/>
                 </a:solidFill>
                 <a:latin typeface="Amiri" pitchFamily="2" charset="-78"/>
+                <a:ea typeface="Amiri" pitchFamily="2" charset="-78"/>
                 <a:cs typeface="Amiri" pitchFamily="2" charset="-78"/>
               </a:rPr>
               <a:t>نُقْطَةُ ضَعْفٍ</a:t>
@@ -21696,6 +21819,7 @@
                   <a:srgbClr val="1B3B6F"/>
                 </a:solidFill>
                 <a:latin typeface="Amiri" pitchFamily="2" charset="-78"/>
+                <a:ea typeface="Amiri" pitchFamily="2" charset="-78"/>
                 <a:cs typeface="Amiri" pitchFamily="2" charset="-78"/>
               </a:rPr>
               <a:t>التَّطَوُّعُ فِي نَادِي الأَطْفَالِ</a:t>
@@ -21734,6 +21858,7 @@
                   <a:srgbClr val="1B3B6F"/>
                 </a:solidFill>
                 <a:latin typeface="Amiri" pitchFamily="2" charset="-78"/>
+                <a:ea typeface="Amiri" pitchFamily="2" charset="-78"/>
                 <a:cs typeface="Amiri" pitchFamily="2" charset="-78"/>
               </a:rPr>
               <a:t>نَشَاطٌ يُظْهِرُ صِفَاتِكَ</a:t>
@@ -21875,6 +22000,7 @@
                   <a:srgbClr val="1B3B6F"/>
                 </a:solidFill>
                 <a:latin typeface="Amiri" pitchFamily="2" charset="-78"/>
+                <a:ea typeface="Amiri" pitchFamily="2" charset="-78"/>
                 <a:cs typeface="Amiri" pitchFamily="2" charset="-78"/>
               </a:rPr>
               <a:t>مُعَلِّمَةُ رَوْضَةٍ</a:t>
@@ -21913,6 +22039,7 @@
                   <a:srgbClr val="1B3B6F"/>
                 </a:solidFill>
                 <a:latin typeface="Amiri" pitchFamily="2" charset="-78"/>
+                <a:ea typeface="Amiri" pitchFamily="2" charset="-78"/>
                 <a:cs typeface="Amiri" pitchFamily="2" charset="-78"/>
               </a:rPr>
               <a:t>وَظِيفَةٌ تُنَاسِبُكَ</a:t>
@@ -22054,6 +22181,7 @@
                   <a:srgbClr val="1B3B6F"/>
                 </a:solidFill>
                 <a:latin typeface="Amiri" pitchFamily="2" charset="-78"/>
+                <a:ea typeface="Amiri" pitchFamily="2" charset="-78"/>
                 <a:cs typeface="Amiri" pitchFamily="2" charset="-78"/>
               </a:rPr>
               <a:t>الثِّقَةُ بِالنَّفْسِ</a:t>
@@ -22092,6 +22220,7 @@
                   <a:srgbClr val="1B3B6F"/>
                 </a:solidFill>
                 <a:latin typeface="Amiri" pitchFamily="2" charset="-78"/>
+                <a:ea typeface="Amiri" pitchFamily="2" charset="-78"/>
                 <a:cs typeface="Amiri" pitchFamily="2" charset="-78"/>
               </a:rPr>
               <a:t>صِفَةٌ تُرِيدُ أَنْ تُطَوِّرَهَا</a:t>
@@ -22236,6 +22365,7 @@
                   <a:srgbClr val="1B3B6F"/>
                 </a:solidFill>
                 <a:latin typeface="Amiri" pitchFamily="2" charset="-78"/>
+                <a:ea typeface="Amiri" pitchFamily="2" charset="-78"/>
                 <a:cs typeface="Amiri" pitchFamily="2" charset="-78"/>
               </a:rPr>
               <a:t>تُنَاسِبُنِي لِأَنَّ المُعَلِّمَةَ الَّتِي تَعْمَلُ مَعَ الصِّغَارِ تَحْتَاجُ إِلَى الصَّبْرِ، وَأَنَا صَبُورَةٌ جِدًّا.</a:t>
@@ -22274,6 +22404,7 @@
                   <a:srgbClr val="1B3B6F"/>
                 </a:solidFill>
                 <a:latin typeface="Amiri" pitchFamily="2" charset="-78"/>
+                <a:ea typeface="Amiri" pitchFamily="2" charset="-78"/>
                 <a:cs typeface="Amiri" pitchFamily="2" charset="-78"/>
               </a:rPr>
               <a:t>جُمْلَةٌ: لِمَاذَا تُنَاسِبُكَ هٰذِهِ الوَظِيفَةُ؟</a:t>
@@ -22483,6 +22614,7 @@
                   <a:srgbClr val="D4AF37"/>
                 </a:solidFill>
                 <a:latin typeface="Amiri" pitchFamily="2" charset="-78"/>
+                <a:ea typeface="Amiri" pitchFamily="2" charset="-78"/>
                 <a:cs typeface="Amiri" pitchFamily="2" charset="-78"/>
               </a:rPr>
               <a:t>م</a:t>
@@ -22803,6 +22935,7 @@
                   <a:srgbClr val="8A6D1E"/>
                 </a:solidFill>
                 <a:latin typeface="Amiri" pitchFamily="2" charset="-78"/>
+                <a:ea typeface="Amiri" pitchFamily="2" charset="-78"/>
                 <a:cs typeface="Amiri" pitchFamily="2" charset="-78"/>
               </a:rPr>
               <a:t>رِسَالَةُ طَلَبِ وَظِيفَةٍ</a:t>
@@ -23278,6 +23411,7 @@
                   <a:srgbClr val="1B3B6F"/>
                 </a:solidFill>
                 <a:latin typeface="Amiri" pitchFamily="2" charset="-78"/>
+                <a:ea typeface="Amiri" pitchFamily="2" charset="-78"/>
                 <a:cs typeface="Amiri" pitchFamily="2" charset="-78"/>
               </a:rPr>
               <a:t>رَأَيْتُ إِعْلَانَكُمْ عَنْ وَظِيفَةِ …</a:t>
@@ -23354,6 +23488,7 @@
                   <a:srgbClr val="1B3B6F"/>
                 </a:solidFill>
                 <a:latin typeface="Amiri" pitchFamily="2" charset="-78"/>
+                <a:ea typeface="Amiri" pitchFamily="2" charset="-78"/>
                 <a:cs typeface="Amiri" pitchFamily="2" charset="-78"/>
               </a:rPr>
               <a:t>أَنَا … وَ… فَمَثَلًا …</a:t>
@@ -23430,6 +23565,7 @@
                   <a:srgbClr val="1B3B6F"/>
                 </a:solidFill>
                 <a:latin typeface="Amiri" pitchFamily="2" charset="-78"/>
+                <a:ea typeface="Amiri" pitchFamily="2" charset="-78"/>
                 <a:cs typeface="Amiri" pitchFamily="2" charset="-78"/>
               </a:rPr>
               <a:t>فِي الصَّيْفِ المَاضِي تَطَوَّعْتُ فِي …</a:t>
@@ -23506,6 +23642,7 @@
                   <a:srgbClr val="1B3B6F"/>
                 </a:solidFill>
                 <a:latin typeface="Amiri" pitchFamily="2" charset="-78"/>
+                <a:ea typeface="Amiri" pitchFamily="2" charset="-78"/>
                 <a:cs typeface="Amiri" pitchFamily="2" charset="-78"/>
               </a:rPr>
               <a:t>سَأَكُونُ مُتَاحَةً مِنْ … إِلَى …</a:t>
@@ -23677,6 +23814,7 @@
                   <a:srgbClr val="D4AF37"/>
                 </a:solidFill>
                 <a:latin typeface="Amiri" pitchFamily="2" charset="-78"/>
+                <a:ea typeface="Amiri" pitchFamily="2" charset="-78"/>
                 <a:cs typeface="Amiri" pitchFamily="2" charset="-78"/>
               </a:rPr>
               <a:t>م</a:t>
@@ -23997,6 +24135,7 @@
                   <a:srgbClr val="8A6D1E"/>
                 </a:solidFill>
                 <a:latin typeface="Amiri" pitchFamily="2" charset="-78"/>
+                <a:ea typeface="Amiri" pitchFamily="2" charset="-78"/>
                 <a:cs typeface="Amiri" pitchFamily="2" charset="-78"/>
               </a:rPr>
               <a:t>نَصُّ السُّؤَالِ</a:t>
@@ -24277,6 +24416,7 @@
                   <a:srgbClr val="1B3B6F"/>
                 </a:solidFill>
                 <a:latin typeface="Amiri" pitchFamily="2" charset="-78"/>
+                <a:ea typeface="Amiri" pitchFamily="2" charset="-78"/>
                 <a:cs typeface="Amiri" pitchFamily="2" charset="-78"/>
               </a:rPr>
               <a:t>تُرِيدِينَ وَظِيفَةً صَيْفِيَّةً فِي مُخَيَّمٍ لِلْأَطْفَالِ. اكْتُبِي رِسَالَةً (٨٠–٩٠ كَلِمَةً).</a:t>
@@ -24418,6 +24558,7 @@
                   <a:srgbClr val="1B3B6F"/>
                 </a:solidFill>
                 <a:latin typeface="Amiri" pitchFamily="2" charset="-78"/>
+                <a:ea typeface="Amiri" pitchFamily="2" charset="-78"/>
                 <a:cs typeface="Amiri" pitchFamily="2" charset="-78"/>
               </a:rPr>
               <a:t>أَيُّ وَظِيفَةٍ تَطْلُبِينَ؟</a:t>
@@ -24559,6 +24700,7 @@
                   <a:srgbClr val="1B3B6F"/>
                 </a:solidFill>
                 <a:latin typeface="Amiri" pitchFamily="2" charset="-78"/>
+                <a:ea typeface="Amiri" pitchFamily="2" charset="-78"/>
                 <a:cs typeface="Amiri" pitchFamily="2" charset="-78"/>
               </a:rPr>
               <a:t>مَا صِفَاتُكِ؟ أَعْطِي مِثَالًا.</a:t>
@@ -24700,6 +24842,7 @@
                   <a:srgbClr val="1B3B6F"/>
                 </a:solidFill>
                 <a:latin typeface="Amiri" pitchFamily="2" charset="-78"/>
+                <a:ea typeface="Amiri" pitchFamily="2" charset="-78"/>
                 <a:cs typeface="Amiri" pitchFamily="2" charset="-78"/>
               </a:rPr>
               <a:t>صِفِي تَجْرِبَةً سَابِقَةً تُظْهِرُ صِفَاتِكِ.</a:t>
@@ -24841,6 +24984,7 @@
                   <a:srgbClr val="1B3B6F"/>
                 </a:solidFill>
                 <a:latin typeface="Amiri" pitchFamily="2" charset="-78"/>
+                <a:ea typeface="Amiri" pitchFamily="2" charset="-78"/>
                 <a:cs typeface="Amiri" pitchFamily="2" charset="-78"/>
               </a:rPr>
               <a:t>مَا نُقْطَةُ ضَعْفِكِ؟ وَلِمَاذَا تُنَاسِبُكِ الوَظِيفَةُ؟ وَمَتَى أَنْتِ مُتَاحَةٌ؟</a:t>
@@ -25050,6 +25194,7 @@
                   <a:srgbClr val="D4AF37"/>
                 </a:solidFill>
                 <a:latin typeface="Amiri" pitchFamily="2" charset="-78"/>
+                <a:ea typeface="Amiri" pitchFamily="2" charset="-78"/>
                 <a:cs typeface="Amiri" pitchFamily="2" charset="-78"/>
               </a:rPr>
               <a:t>م</a:t>
@@ -25370,6 +25515,7 @@
                   <a:srgbClr val="8A6D1E"/>
                 </a:solidFill>
                 <a:latin typeface="Amiri" pitchFamily="2" charset="-78"/>
+                <a:ea typeface="Amiri" pitchFamily="2" charset="-78"/>
                 <a:cs typeface="Amiri" pitchFamily="2" charset="-78"/>
               </a:rPr>
               <a:t>قَوَالِبُ الكِتَابَةِ</a:t>
@@ -25650,6 +25796,7 @@
                   <a:srgbClr val="1B3B6F"/>
                 </a:solidFill>
                 <a:latin typeface="Amiri" pitchFamily="2" charset="-78"/>
+                <a:ea typeface="Amiri" pitchFamily="2" charset="-78"/>
                 <a:cs typeface="Amiri" pitchFamily="2" charset="-78"/>
               </a:rPr>
               <a:t>إِلَى مُدِيرِ المُخَيَّمِ الصَّيْفِيِّ،</a:t>
@@ -25856,6 +26003,7 @@
                   <a:srgbClr val="1B3B6F"/>
                 </a:solidFill>
                 <a:latin typeface="Amiri" pitchFamily="2" charset="-78"/>
+                <a:ea typeface="Amiri" pitchFamily="2" charset="-78"/>
                 <a:cs typeface="Amiri" pitchFamily="2" charset="-78"/>
               </a:rPr>
               <a:t>رَأَيْتُ إِعْلَانَكُمْ عَنْ وَظِيفَةِ ______ ، وَأُرِيدُ أَنْ أَتَقَدَّمَ لَهَا.</a:t>
@@ -26062,6 +26210,7 @@
                   <a:srgbClr val="1B3B6F"/>
                 </a:solidFill>
                 <a:latin typeface="Amiri" pitchFamily="2" charset="-78"/>
+                <a:ea typeface="Amiri" pitchFamily="2" charset="-78"/>
                 <a:cs typeface="Amiri" pitchFamily="2" charset="-78"/>
               </a:rPr>
               <a:t>أَنَا ______ وَ______ . فَمَثَلًا ______ .</a:t>
@@ -26268,6 +26417,7 @@
                   <a:srgbClr val="1B3B6F"/>
                 </a:solidFill>
                 <a:latin typeface="Amiri" pitchFamily="2" charset="-78"/>
+                <a:ea typeface="Amiri" pitchFamily="2" charset="-78"/>
                 <a:cs typeface="Amiri" pitchFamily="2" charset="-78"/>
               </a:rPr>
               <a:t>فِي الصَّيْفِ المَاضِي ______ ، وَكَانَتْ تَجْرِبَةً ______ .</a:t>
@@ -26474,6 +26624,7 @@
                   <a:srgbClr val="1B3B6F"/>
                 </a:solidFill>
                 <a:latin typeface="Amiri" pitchFamily="2" charset="-78"/>
+                <a:ea typeface="Amiri" pitchFamily="2" charset="-78"/>
                 <a:cs typeface="Amiri" pitchFamily="2" charset="-78"/>
               </a:rPr>
               <a:t>نُقْطَةُ ضَعْفِي ______ . سَأَكُونُ مُتَاحَةً مِنْ ______ .</a:t>
@@ -26680,6 +26831,7 @@
                   <a:srgbClr val="1B3B6F"/>
                 </a:solidFill>
                 <a:latin typeface="Amiri" pitchFamily="2" charset="-78"/>
+                <a:ea typeface="Amiri" pitchFamily="2" charset="-78"/>
                 <a:cs typeface="Amiri" pitchFamily="2" charset="-78"/>
               </a:rPr>
               <a:t>مَعَ الشُّكْرِ، ______</a:t>
@@ -26919,13 +27071,9 @@
     <a:fontScheme name="Office">
       <a:majorFont>
         <a:latin typeface="Calibri Light" panose="020F0302020204030204"/>
-        <a:ea typeface=""/>
-        <a:cs typeface=""/>
-        <a:font script="Jpan" typeface="游ゴシック Light"/>
-        <a:font script="Hang" typeface="맑은 고딕"/>
-        <a:font script="Hans" typeface="等线 Light"/>
-        <a:font script="Hant" typeface="新細明體"/>
-        <a:font script="Arab" typeface="Times New Roman"/>
+        <a:ea typeface="Amiri" pitchFamily="2" charset="-78"/>
+        <a:cs typeface="Amiri" pitchFamily="2" charset="-78"/>
+        <a:font script="Arab" typeface="Amiri"/>
         <a:font script="Hebr" typeface="Times New Roman"/>
         <a:font script="Thai" typeface="Angsana New"/>
         <a:font script="Ethi" typeface="Nyala"/>
@@ -26971,13 +27119,9 @@
       </a:majorFont>
       <a:minorFont>
         <a:latin typeface="Calibri" panose="020F0502020204030204"/>
-        <a:ea typeface=""/>
-        <a:cs typeface=""/>
-        <a:font script="Jpan" typeface="游ゴシック"/>
-        <a:font script="Hang" typeface="맑은 고딕"/>
-        <a:font script="Hans" typeface="等线"/>
-        <a:font script="Hant" typeface="新細明體"/>
-        <a:font script="Arab" typeface="Arial"/>
+        <a:ea typeface="Amiri" pitchFamily="2" charset="-78"/>
+        <a:cs typeface="Amiri" pitchFamily="2" charset="-78"/>
+        <a:font script="Arab" typeface="Amiri"/>
         <a:font script="Hebr" typeface="Arial"/>
         <a:font script="Thai" typeface="Cordia New"/>
         <a:font script="Ethi" typeface="Nyala"/>

--- a/Topic_D/Exam_Practice/TD-L08_Writing_Workshop_Personal_Qualities_and_Professional_Skills.pptx
+++ b/Topic_D/Exam_Practice/TD-L08_Writing_Workshop_Personal_Qualities_and_Professional_Skills.pptx
@@ -3848,7 +3848,7 @@
                 <a:solidFill>
                   <a:srgbClr val="FFFFFF"/>
                 </a:solidFill>
-                <a:latin typeface="Calibri" pitchFamily="34" charset="0"/>
+                <a:latin typeface="Amiri" pitchFamily="2" charset="-78"/>
                 <a:ea typeface="Amiri" pitchFamily="2" charset="-78"/>
                 <a:cs typeface="Amiri" pitchFamily="2" charset="-78"/>
               </a:rPr>
@@ -3914,7 +3914,7 @@
                 <a:solidFill>
                   <a:srgbClr val="FFFFFF"/>
                 </a:solidFill>
-                <a:latin typeface="Calibri" pitchFamily="34" charset="0"/>
+                <a:latin typeface="Amiri" pitchFamily="2" charset="-78"/>
                 <a:ea typeface="Amiri" pitchFamily="2" charset="-78"/>
                 <a:cs typeface="Amiri" pitchFamily="2" charset="-78"/>
               </a:rPr>
@@ -3980,7 +3980,7 @@
                 <a:solidFill>
                   <a:srgbClr val="FFFFFF"/>
                 </a:solidFill>
-                <a:latin typeface="Calibri" pitchFamily="34" charset="0"/>
+                <a:latin typeface="Amiri" pitchFamily="2" charset="-78"/>
                 <a:ea typeface="Amiri" pitchFamily="2" charset="-78"/>
                 <a:cs typeface="Amiri" pitchFamily="2" charset="-78"/>
               </a:rPr>
@@ -4046,7 +4046,7 @@
                 <a:solidFill>
                   <a:srgbClr val="FFFFFF"/>
                 </a:solidFill>
-                <a:latin typeface="Calibri" pitchFamily="34" charset="0"/>
+                <a:latin typeface="Amiri" pitchFamily="2" charset="-78"/>
                 <a:ea typeface="Amiri" pitchFamily="2" charset="-78"/>
                 <a:cs typeface="Amiri" pitchFamily="2" charset="-78"/>
               </a:rPr>
@@ -4844,7 +4844,7 @@
                 <a:solidFill>
                   <a:srgbClr val="FFFFFF"/>
                 </a:solidFill>
-                <a:latin typeface="Calibri" pitchFamily="34" charset="0"/>
+                <a:latin typeface="Amiri" pitchFamily="2" charset="-78"/>
                 <a:ea typeface="Amiri" pitchFamily="2" charset="-78"/>
                 <a:cs typeface="Amiri" pitchFamily="2" charset="-78"/>
               </a:rPr>
@@ -4910,7 +4910,7 @@
                 <a:solidFill>
                   <a:srgbClr val="FFFFFF"/>
                 </a:solidFill>
-                <a:latin typeface="Calibri" pitchFamily="34" charset="0"/>
+                <a:latin typeface="Amiri" pitchFamily="2" charset="-78"/>
                 <a:ea typeface="Amiri" pitchFamily="2" charset="-78"/>
                 <a:cs typeface="Amiri" pitchFamily="2" charset="-78"/>
               </a:rPr>
@@ -4976,7 +4976,7 @@
                 <a:solidFill>
                   <a:srgbClr val="FFFFFF"/>
                 </a:solidFill>
-                <a:latin typeface="Calibri" pitchFamily="34" charset="0"/>
+                <a:latin typeface="Amiri" pitchFamily="2" charset="-78"/>
                 <a:ea typeface="Amiri" pitchFamily="2" charset="-78"/>
                 <a:cs typeface="Amiri" pitchFamily="2" charset="-78"/>
               </a:rPr>
@@ -5042,7 +5042,7 @@
                 <a:solidFill>
                   <a:srgbClr val="FFFFFF"/>
                 </a:solidFill>
-                <a:latin typeface="Calibri" pitchFamily="34" charset="0"/>
+                <a:latin typeface="Amiri" pitchFamily="2" charset="-78"/>
                 <a:ea typeface="Amiri" pitchFamily="2" charset="-78"/>
                 <a:cs typeface="Amiri" pitchFamily="2" charset="-78"/>
               </a:rPr>
@@ -8602,7 +8602,7 @@
                 <a:solidFill>
                   <a:srgbClr val="FFFFFF"/>
                 </a:solidFill>
-                <a:latin typeface="Calibri" pitchFamily="34" charset="0"/>
+                <a:latin typeface="Amiri" pitchFamily="2" charset="-78"/>
                 <a:ea typeface="Amiri" pitchFamily="2" charset="-78"/>
                 <a:cs typeface="Amiri" pitchFamily="2" charset="-78"/>
               </a:rPr>
@@ -8668,7 +8668,7 @@
                 <a:solidFill>
                   <a:srgbClr val="FFFFFF"/>
                 </a:solidFill>
-                <a:latin typeface="Calibri" pitchFamily="34" charset="0"/>
+                <a:latin typeface="Amiri" pitchFamily="2" charset="-78"/>
                 <a:ea typeface="Amiri" pitchFamily="2" charset="-78"/>
                 <a:cs typeface="Amiri" pitchFamily="2" charset="-78"/>
               </a:rPr>
@@ -8734,7 +8734,7 @@
                 <a:solidFill>
                   <a:srgbClr val="FFFFFF"/>
                 </a:solidFill>
-                <a:latin typeface="Calibri" pitchFamily="34" charset="0"/>
+                <a:latin typeface="Amiri" pitchFamily="2" charset="-78"/>
                 <a:ea typeface="Amiri" pitchFamily="2" charset="-78"/>
                 <a:cs typeface="Amiri" pitchFamily="2" charset="-78"/>
               </a:rPr>
@@ -8800,7 +8800,7 @@
                 <a:solidFill>
                   <a:srgbClr val="FFFFFF"/>
                 </a:solidFill>
-                <a:latin typeface="Calibri" pitchFamily="34" charset="0"/>
+                <a:latin typeface="Amiri" pitchFamily="2" charset="-78"/>
                 <a:ea typeface="Amiri" pitchFamily="2" charset="-78"/>
                 <a:cs typeface="Amiri" pitchFamily="2" charset="-78"/>
               </a:rPr>
@@ -9587,7 +9587,7 @@
                 <a:solidFill>
                   <a:srgbClr val="FFFFFF"/>
                 </a:solidFill>
-                <a:latin typeface="Calibri" pitchFamily="34" charset="0"/>
+                <a:latin typeface="Amiri" pitchFamily="2" charset="-78"/>
                 <a:ea typeface="Amiri" pitchFamily="2" charset="-78"/>
                 <a:cs typeface="Amiri" pitchFamily="2" charset="-78"/>
               </a:rPr>
@@ -9653,7 +9653,7 @@
                 <a:solidFill>
                   <a:srgbClr val="FFFFFF"/>
                 </a:solidFill>
-                <a:latin typeface="Calibri" pitchFamily="34" charset="0"/>
+                <a:latin typeface="Amiri" pitchFamily="2" charset="-78"/>
                 <a:ea typeface="Amiri" pitchFamily="2" charset="-78"/>
                 <a:cs typeface="Amiri" pitchFamily="2" charset="-78"/>
               </a:rPr>
@@ -9719,7 +9719,7 @@
                 <a:solidFill>
                   <a:srgbClr val="FFFFFF"/>
                 </a:solidFill>
-                <a:latin typeface="Calibri" pitchFamily="34" charset="0"/>
+                <a:latin typeface="Amiri" pitchFamily="2" charset="-78"/>
                 <a:ea typeface="Amiri" pitchFamily="2" charset="-78"/>
                 <a:cs typeface="Amiri" pitchFamily="2" charset="-78"/>
               </a:rPr>
@@ -9785,7 +9785,7 @@
                 <a:solidFill>
                   <a:srgbClr val="FFFFFF"/>
                 </a:solidFill>
-                <a:latin typeface="Calibri" pitchFamily="34" charset="0"/>
+                <a:latin typeface="Amiri" pitchFamily="2" charset="-78"/>
                 <a:ea typeface="Amiri" pitchFamily="2" charset="-78"/>
                 <a:cs typeface="Amiri" pitchFamily="2" charset="-78"/>
               </a:rPr>
@@ -10572,7 +10572,7 @@
                 <a:solidFill>
                   <a:srgbClr val="FFFFFF"/>
                 </a:solidFill>
-                <a:latin typeface="Calibri" pitchFamily="34" charset="0"/>
+                <a:latin typeface="Amiri" pitchFamily="2" charset="-78"/>
                 <a:ea typeface="Amiri" pitchFamily="2" charset="-78"/>
                 <a:cs typeface="Amiri" pitchFamily="2" charset="-78"/>
               </a:rPr>
@@ -10638,7 +10638,7 @@
                 <a:solidFill>
                   <a:srgbClr val="FFFFFF"/>
                 </a:solidFill>
-                <a:latin typeface="Calibri" pitchFamily="34" charset="0"/>
+                <a:latin typeface="Amiri" pitchFamily="2" charset="-78"/>
                 <a:ea typeface="Amiri" pitchFamily="2" charset="-78"/>
                 <a:cs typeface="Amiri" pitchFamily="2" charset="-78"/>
               </a:rPr>
@@ -10704,7 +10704,7 @@
                 <a:solidFill>
                   <a:srgbClr val="FFFFFF"/>
                 </a:solidFill>
-                <a:latin typeface="Calibri" pitchFamily="34" charset="0"/>
+                <a:latin typeface="Amiri" pitchFamily="2" charset="-78"/>
                 <a:ea typeface="Amiri" pitchFamily="2" charset="-78"/>
                 <a:cs typeface="Amiri" pitchFamily="2" charset="-78"/>
               </a:rPr>
@@ -10770,7 +10770,7 @@
                 <a:solidFill>
                   <a:srgbClr val="FFFFFF"/>
                 </a:solidFill>
-                <a:latin typeface="Calibri" pitchFamily="34" charset="0"/>
+                <a:latin typeface="Amiri" pitchFamily="2" charset="-78"/>
                 <a:ea typeface="Amiri" pitchFamily="2" charset="-78"/>
                 <a:cs typeface="Amiri" pitchFamily="2" charset="-78"/>
               </a:rPr>
